--- a/website/public/generated/Nasr-city-Tunnel/06_samco_pco_01_pro_tia_01_time_impact_extension_of_time.pptx
+++ b/website/public/generated/Nasr-city-Tunnel/06_samco_pco_01_pro_tia_01_time_impact_extension_of_time.pptx
@@ -3162,7 +3162,7 @@
               </a:defRPr>
             </a:pPr>
             <a:r>
-              <a:t>Nasr city-Tunnel | 1 data-driven control section | 2026-08-14T03:05:38+00:00</a:t>
+              <a:t>Nasr city-Tunnel | 1 data-driven control section | 2026-08-15T05:31:06+00:00</a:t>
             </a:r>
           </a:p>
         </p:txBody>
